--- a/20250702_BRAD_ACE_Upgrade.pptx
+++ b/20250702_BRAD_ACE_Upgrade.pptx
@@ -8,6 +8,7 @@
     <p:sldId id="256" r:id="rId2"/>
     <p:sldId id="257" r:id="rId3"/>
     <p:sldId id="258" r:id="rId4"/>
+    <p:sldId id="259" r:id="rId5"/>
   </p:sldIdLst>
   <p:sldSz cx="12192000" cy="6858000"/>
   <p:notesSz cx="6858000" cy="9144000"/>
@@ -402,7 +403,7 @@
           <a:p>
             <a:fld id="{A2B97D7A-9210-4DEF-ABD2-505690E69A14}" type="datetimeFigureOut">
               <a:rPr lang="en-US" smtClean="0"/>
-              <a:t>7/22/2025</a:t>
+              <a:t>9/29/2025</a:t>
             </a:fld>
             <a:endParaRPr lang="en-US"/>
           </a:p>
@@ -600,7 +601,7 @@
           <a:p>
             <a:fld id="{A2B97D7A-9210-4DEF-ABD2-505690E69A14}" type="datetimeFigureOut">
               <a:rPr lang="en-US" smtClean="0"/>
-              <a:t>7/22/2025</a:t>
+              <a:t>9/29/2025</a:t>
             </a:fld>
             <a:endParaRPr lang="en-US"/>
           </a:p>
@@ -808,7 +809,7 @@
           <a:p>
             <a:fld id="{A2B97D7A-9210-4DEF-ABD2-505690E69A14}" type="datetimeFigureOut">
               <a:rPr lang="en-US" smtClean="0"/>
-              <a:t>7/22/2025</a:t>
+              <a:t>9/29/2025</a:t>
             </a:fld>
             <a:endParaRPr lang="en-US"/>
           </a:p>
@@ -1006,7 +1007,7 @@
           <a:p>
             <a:fld id="{A2B97D7A-9210-4DEF-ABD2-505690E69A14}" type="datetimeFigureOut">
               <a:rPr lang="en-US" smtClean="0"/>
-              <a:t>7/22/2025</a:t>
+              <a:t>9/29/2025</a:t>
             </a:fld>
             <a:endParaRPr lang="en-US"/>
           </a:p>
@@ -1281,7 +1282,7 @@
           <a:p>
             <a:fld id="{A2B97D7A-9210-4DEF-ABD2-505690E69A14}" type="datetimeFigureOut">
               <a:rPr lang="en-US" smtClean="0"/>
-              <a:t>7/22/2025</a:t>
+              <a:t>9/29/2025</a:t>
             </a:fld>
             <a:endParaRPr lang="en-US"/>
           </a:p>
@@ -1546,7 +1547,7 @@
           <a:p>
             <a:fld id="{A2B97D7A-9210-4DEF-ABD2-505690E69A14}" type="datetimeFigureOut">
               <a:rPr lang="en-US" smtClean="0"/>
-              <a:t>7/22/2025</a:t>
+              <a:t>9/29/2025</a:t>
             </a:fld>
             <a:endParaRPr lang="en-US"/>
           </a:p>
@@ -1958,7 +1959,7 @@
           <a:p>
             <a:fld id="{A2B97D7A-9210-4DEF-ABD2-505690E69A14}" type="datetimeFigureOut">
               <a:rPr lang="en-US" smtClean="0"/>
-              <a:t>7/22/2025</a:t>
+              <a:t>9/29/2025</a:t>
             </a:fld>
             <a:endParaRPr lang="en-US"/>
           </a:p>
@@ -2099,7 +2100,7 @@
           <a:p>
             <a:fld id="{A2B97D7A-9210-4DEF-ABD2-505690E69A14}" type="datetimeFigureOut">
               <a:rPr lang="en-US" smtClean="0"/>
-              <a:t>7/22/2025</a:t>
+              <a:t>9/29/2025</a:t>
             </a:fld>
             <a:endParaRPr lang="en-US"/>
           </a:p>
@@ -2212,7 +2213,7 @@
           <a:p>
             <a:fld id="{A2B97D7A-9210-4DEF-ABD2-505690E69A14}" type="datetimeFigureOut">
               <a:rPr lang="en-US" smtClean="0"/>
-              <a:t>7/22/2025</a:t>
+              <a:t>9/29/2025</a:t>
             </a:fld>
             <a:endParaRPr lang="en-US"/>
           </a:p>
@@ -2523,7 +2524,7 @@
           <a:p>
             <a:fld id="{A2B97D7A-9210-4DEF-ABD2-505690E69A14}" type="datetimeFigureOut">
               <a:rPr lang="en-US" smtClean="0"/>
-              <a:t>7/22/2025</a:t>
+              <a:t>9/29/2025</a:t>
             </a:fld>
             <a:endParaRPr lang="en-US"/>
           </a:p>
@@ -2811,7 +2812,7 @@
           <a:p>
             <a:fld id="{A2B97D7A-9210-4DEF-ABD2-505690E69A14}" type="datetimeFigureOut">
               <a:rPr lang="en-US" smtClean="0"/>
-              <a:t>7/22/2025</a:t>
+              <a:t>9/29/2025</a:t>
             </a:fld>
             <a:endParaRPr lang="en-US"/>
           </a:p>
@@ -3052,7 +3053,7 @@
           <a:p>
             <a:fld id="{A2B97D7A-9210-4DEF-ABD2-505690E69A14}" type="datetimeFigureOut">
               <a:rPr lang="en-US" smtClean="0"/>
-              <a:t>7/22/2025</a:t>
+              <a:t>9/29/2025</a:t>
             </a:fld>
             <a:endParaRPr lang="en-US"/>
           </a:p>
@@ -7535,6 +7536,1364 @@
     <p:extLst>
       <p:ext uri="{BB962C8B-B14F-4D97-AF65-F5344CB8AC3E}">
         <p14:creationId xmlns:p14="http://schemas.microsoft.com/office/powerpoint/2010/main" val="2968189349"/>
+      </p:ext>
+    </p:extLst>
+  </p:cSld>
+  <p:clrMapOvr>
+    <a:masterClrMapping/>
+  </p:clrMapOvr>
+</p:sld>
+</file>
+
+<file path=ppt/slides/slide4.xml><?xml version="1.0" encoding="utf-8"?>
+<p:sld xmlns:a="http://schemas.openxmlformats.org/drawingml/2006/main" xmlns:r="http://schemas.openxmlformats.org/officeDocument/2006/relationships" xmlns:p="http://schemas.openxmlformats.org/presentationml/2006/main">
+  <p:cSld>
+    <p:spTree>
+      <p:nvGrpSpPr>
+        <p:cNvPr id="1" name=""/>
+        <p:cNvGrpSpPr/>
+        <p:nvPr/>
+      </p:nvGrpSpPr>
+      <p:grpSpPr>
+        <a:xfrm>
+          <a:off x="0" y="0"/>
+          <a:ext cx="0" cy="0"/>
+          <a:chOff x="0" y="0"/>
+          <a:chExt cx="0" cy="0"/>
+        </a:xfrm>
+      </p:grpSpPr>
+      <p:sp>
+        <p:nvSpPr>
+          <p:cNvPr id="23" name="Rectangle 22">
+            <a:extLst>
+              <a:ext uri="{FF2B5EF4-FFF2-40B4-BE49-F238E27FC236}">
+                <a16:creationId xmlns:a16="http://schemas.microsoft.com/office/drawing/2014/main" id="{BDA94054-000F-000B-BF50-6018833D1648}"/>
+              </a:ext>
+            </a:extLst>
+          </p:cNvPr>
+          <p:cNvSpPr/>
+          <p:nvPr/>
+        </p:nvSpPr>
+        <p:spPr>
+          <a:xfrm>
+            <a:off x="254500" y="365157"/>
+            <a:ext cx="3170776" cy="2453848"/>
+          </a:xfrm>
+          <a:prstGeom prst="rect">
+            <a:avLst/>
+          </a:prstGeom>
+          <a:solidFill>
+            <a:schemeClr val="bg1"/>
+          </a:solidFill>
+        </p:spPr>
+        <p:style>
+          <a:lnRef idx="2">
+            <a:schemeClr val="accent1">
+              <a:shade val="15000"/>
+            </a:schemeClr>
+          </a:lnRef>
+          <a:fillRef idx="1">
+            <a:schemeClr val="accent1"/>
+          </a:fillRef>
+          <a:effectRef idx="0">
+            <a:schemeClr val="accent1"/>
+          </a:effectRef>
+          <a:fontRef idx="minor">
+            <a:schemeClr val="lt1"/>
+          </a:fontRef>
+        </p:style>
+        <p:txBody>
+          <a:bodyPr rtlCol="0" anchor="t"/>
+          <a:lstStyle/>
+          <a:p>
+            <a:pPr algn="ctr"/>
+            <a:r>
+              <a:rPr lang="pt-BR" dirty="0">
+                <a:solidFill>
+                  <a:schemeClr val="tx1"/>
+                </a:solidFill>
+              </a:rPr>
+              <a:t>Servidor</a:t>
+            </a:r>
+            <a:endParaRPr lang="en-US" dirty="0">
+              <a:solidFill>
+                <a:schemeClr val="tx1"/>
+              </a:solidFill>
+            </a:endParaRPr>
+          </a:p>
+        </p:txBody>
+      </p:sp>
+      <p:sp>
+        <p:nvSpPr>
+          <p:cNvPr id="21" name="Rectangle 20">
+            <a:extLst>
+              <a:ext uri="{FF2B5EF4-FFF2-40B4-BE49-F238E27FC236}">
+                <a16:creationId xmlns:a16="http://schemas.microsoft.com/office/drawing/2014/main" id="{7859B25D-906A-5BEA-5523-A00BB926E7D0}"/>
+              </a:ext>
+            </a:extLst>
+          </p:cNvPr>
+          <p:cNvSpPr/>
+          <p:nvPr/>
+        </p:nvSpPr>
+        <p:spPr>
+          <a:xfrm>
+            <a:off x="3986399" y="365157"/>
+            <a:ext cx="7951101" cy="6000474"/>
+          </a:xfrm>
+          <a:prstGeom prst="rect">
+            <a:avLst/>
+          </a:prstGeom>
+          <a:solidFill>
+            <a:schemeClr val="bg1"/>
+          </a:solidFill>
+        </p:spPr>
+        <p:style>
+          <a:lnRef idx="2">
+            <a:schemeClr val="accent1">
+              <a:shade val="15000"/>
+            </a:schemeClr>
+          </a:lnRef>
+          <a:fillRef idx="1">
+            <a:schemeClr val="accent1"/>
+          </a:fillRef>
+          <a:effectRef idx="0">
+            <a:schemeClr val="accent1"/>
+          </a:effectRef>
+          <a:fontRef idx="minor">
+            <a:schemeClr val="lt1"/>
+          </a:fontRef>
+        </p:style>
+        <p:txBody>
+          <a:bodyPr rtlCol="0" anchor="t"/>
+          <a:lstStyle/>
+          <a:p>
+            <a:pPr algn="ctr"/>
+            <a:r>
+              <a:rPr lang="pt-BR" dirty="0">
+                <a:solidFill>
+                  <a:schemeClr val="tx1"/>
+                </a:solidFill>
+              </a:rPr>
+              <a:t>Servidor</a:t>
+            </a:r>
+            <a:endParaRPr lang="en-US" dirty="0">
+              <a:solidFill>
+                <a:schemeClr val="tx1"/>
+              </a:solidFill>
+            </a:endParaRPr>
+          </a:p>
+        </p:txBody>
+      </p:sp>
+      <p:sp>
+        <p:nvSpPr>
+          <p:cNvPr id="4" name="Rectangle 3">
+            <a:extLst>
+              <a:ext uri="{FF2B5EF4-FFF2-40B4-BE49-F238E27FC236}">
+                <a16:creationId xmlns:a16="http://schemas.microsoft.com/office/drawing/2014/main" id="{86FAC5CF-0264-8441-643E-355DC18C9F52}"/>
+              </a:ext>
+            </a:extLst>
+          </p:cNvPr>
+          <p:cNvSpPr/>
+          <p:nvPr/>
+        </p:nvSpPr>
+        <p:spPr>
+          <a:xfrm>
+            <a:off x="9157230" y="1353967"/>
+            <a:ext cx="2619710" cy="1744204"/>
+          </a:xfrm>
+          <a:prstGeom prst="rect">
+            <a:avLst/>
+          </a:prstGeom>
+          <a:solidFill>
+            <a:schemeClr val="accent1">
+              <a:lumMod val="20000"/>
+              <a:lumOff val="80000"/>
+            </a:schemeClr>
+          </a:solidFill>
+        </p:spPr>
+        <p:style>
+          <a:lnRef idx="2">
+            <a:schemeClr val="accent1">
+              <a:shade val="15000"/>
+            </a:schemeClr>
+          </a:lnRef>
+          <a:fillRef idx="1">
+            <a:schemeClr val="accent1"/>
+          </a:fillRef>
+          <a:effectRef idx="0">
+            <a:schemeClr val="accent1"/>
+          </a:effectRef>
+          <a:fontRef idx="minor">
+            <a:schemeClr val="lt1"/>
+          </a:fontRef>
+        </p:style>
+        <p:txBody>
+          <a:bodyPr rtlCol="0" anchor="t"/>
+          <a:lstStyle/>
+          <a:p>
+            <a:r>
+              <a:rPr lang="pt-BR" dirty="0" err="1">
+                <a:solidFill>
+                  <a:schemeClr val="tx1"/>
+                </a:solidFill>
+              </a:rPr>
+              <a:t>I.Node</a:t>
+            </a:r>
+            <a:r>
+              <a:rPr lang="pt-BR" dirty="0">
+                <a:solidFill>
+                  <a:schemeClr val="tx1"/>
+                </a:solidFill>
+              </a:rPr>
+              <a:t> (Broker)</a:t>
+            </a:r>
+            <a:endParaRPr lang="en-US" dirty="0">
+              <a:solidFill>
+                <a:schemeClr val="tx1"/>
+              </a:solidFill>
+            </a:endParaRPr>
+          </a:p>
+        </p:txBody>
+      </p:sp>
+      <p:sp>
+        <p:nvSpPr>
+          <p:cNvPr id="5" name="Rectangle 4">
+            <a:extLst>
+              <a:ext uri="{FF2B5EF4-FFF2-40B4-BE49-F238E27FC236}">
+                <a16:creationId xmlns:a16="http://schemas.microsoft.com/office/drawing/2014/main" id="{6FE3A5C9-567C-148D-4D19-3B0164EF581E}"/>
+              </a:ext>
+            </a:extLst>
+          </p:cNvPr>
+          <p:cNvSpPr/>
+          <p:nvPr/>
+        </p:nvSpPr>
+        <p:spPr>
+          <a:xfrm>
+            <a:off x="9021304" y="4743867"/>
+            <a:ext cx="2458995" cy="1272447"/>
+          </a:xfrm>
+          <a:prstGeom prst="rect">
+            <a:avLst/>
+          </a:prstGeom>
+          <a:solidFill>
+            <a:schemeClr val="accent6">
+              <a:lumMod val="20000"/>
+              <a:lumOff val="80000"/>
+            </a:schemeClr>
+          </a:solidFill>
+        </p:spPr>
+        <p:style>
+          <a:lnRef idx="2">
+            <a:schemeClr val="accent1">
+              <a:shade val="15000"/>
+            </a:schemeClr>
+          </a:lnRef>
+          <a:fillRef idx="1">
+            <a:schemeClr val="accent1"/>
+          </a:fillRef>
+          <a:effectRef idx="0">
+            <a:schemeClr val="accent1"/>
+          </a:effectRef>
+          <a:fontRef idx="minor">
+            <a:schemeClr val="lt1"/>
+          </a:fontRef>
+        </p:style>
+        <p:txBody>
+          <a:bodyPr rtlCol="0" anchor="t"/>
+          <a:lstStyle/>
+          <a:p>
+            <a:r>
+              <a:rPr lang="pt-BR" dirty="0" err="1">
+                <a:solidFill>
+                  <a:schemeClr val="tx1"/>
+                </a:solidFill>
+              </a:rPr>
+              <a:t>I.Server</a:t>
+            </a:r>
+            <a:r>
+              <a:rPr lang="pt-BR" dirty="0">
+                <a:solidFill>
+                  <a:schemeClr val="tx1"/>
+                </a:solidFill>
+              </a:rPr>
+              <a:t> (EG)</a:t>
+            </a:r>
+            <a:endParaRPr lang="en-US" dirty="0">
+              <a:solidFill>
+                <a:schemeClr val="tx1"/>
+              </a:solidFill>
+            </a:endParaRPr>
+          </a:p>
+        </p:txBody>
+      </p:sp>
+      <p:sp>
+        <p:nvSpPr>
+          <p:cNvPr id="6" name="Rectangle 5">
+            <a:extLst>
+              <a:ext uri="{FF2B5EF4-FFF2-40B4-BE49-F238E27FC236}">
+                <a16:creationId xmlns:a16="http://schemas.microsoft.com/office/drawing/2014/main" id="{F5762DF3-856E-DF8C-A375-4357D8B59CA7}"/>
+              </a:ext>
+            </a:extLst>
+          </p:cNvPr>
+          <p:cNvSpPr/>
+          <p:nvPr/>
+        </p:nvSpPr>
+        <p:spPr>
+          <a:xfrm>
+            <a:off x="7797988" y="1813584"/>
+            <a:ext cx="1791729" cy="333633"/>
+          </a:xfrm>
+          <a:prstGeom prst="rect">
+            <a:avLst/>
+          </a:prstGeom>
+          <a:solidFill>
+            <a:schemeClr val="bg1">
+              <a:lumMod val="85000"/>
+            </a:schemeClr>
+          </a:solidFill>
+        </p:spPr>
+        <p:style>
+          <a:lnRef idx="2">
+            <a:schemeClr val="accent1">
+              <a:shade val="15000"/>
+            </a:schemeClr>
+          </a:lnRef>
+          <a:fillRef idx="1">
+            <a:schemeClr val="accent1"/>
+          </a:fillRef>
+          <a:effectRef idx="0">
+            <a:schemeClr val="accent1"/>
+          </a:effectRef>
+          <a:fontRef idx="minor">
+            <a:schemeClr val="lt1"/>
+          </a:fontRef>
+        </p:style>
+        <p:txBody>
+          <a:bodyPr rtlCol="0" anchor="ctr"/>
+          <a:lstStyle/>
+          <a:p>
+            <a:pPr algn="ctr"/>
+            <a:r>
+              <a:rPr lang="pt-BR" dirty="0" err="1">
+                <a:solidFill>
+                  <a:schemeClr val="tx1"/>
+                </a:solidFill>
+              </a:rPr>
+              <a:t>Listener</a:t>
+            </a:r>
+            <a:r>
+              <a:rPr lang="pt-BR" dirty="0">
+                <a:solidFill>
+                  <a:schemeClr val="tx1"/>
+                </a:solidFill>
+              </a:rPr>
+              <a:t> (HTTP)</a:t>
+            </a:r>
+            <a:endParaRPr lang="en-US" dirty="0">
+              <a:solidFill>
+                <a:schemeClr val="tx1"/>
+              </a:solidFill>
+            </a:endParaRPr>
+          </a:p>
+        </p:txBody>
+      </p:sp>
+      <p:sp>
+        <p:nvSpPr>
+          <p:cNvPr id="7" name="Rectangle 6">
+            <a:extLst>
+              <a:ext uri="{FF2B5EF4-FFF2-40B4-BE49-F238E27FC236}">
+                <a16:creationId xmlns:a16="http://schemas.microsoft.com/office/drawing/2014/main" id="{EE3B4A47-BB1D-5433-73B9-27E1792BADCF}"/>
+              </a:ext>
+            </a:extLst>
+          </p:cNvPr>
+          <p:cNvSpPr/>
+          <p:nvPr/>
+        </p:nvSpPr>
+        <p:spPr>
+          <a:xfrm>
+            <a:off x="7797988" y="2267694"/>
+            <a:ext cx="1791729" cy="333633"/>
+          </a:xfrm>
+          <a:prstGeom prst="rect">
+            <a:avLst/>
+          </a:prstGeom>
+          <a:solidFill>
+            <a:schemeClr val="bg1">
+              <a:lumMod val="85000"/>
+            </a:schemeClr>
+          </a:solidFill>
+        </p:spPr>
+        <p:style>
+          <a:lnRef idx="2">
+            <a:schemeClr val="accent1">
+              <a:shade val="15000"/>
+            </a:schemeClr>
+          </a:lnRef>
+          <a:fillRef idx="1">
+            <a:schemeClr val="accent1"/>
+          </a:fillRef>
+          <a:effectRef idx="0">
+            <a:schemeClr val="accent1"/>
+          </a:effectRef>
+          <a:fontRef idx="minor">
+            <a:schemeClr val="lt1"/>
+          </a:fontRef>
+        </p:style>
+        <p:txBody>
+          <a:bodyPr rtlCol="0" anchor="ctr"/>
+          <a:lstStyle/>
+          <a:p>
+            <a:pPr algn="ctr"/>
+            <a:r>
+              <a:rPr lang="pt-BR" dirty="0" err="1">
+                <a:solidFill>
+                  <a:schemeClr val="tx1"/>
+                </a:solidFill>
+              </a:rPr>
+              <a:t>Listener</a:t>
+            </a:r>
+            <a:r>
+              <a:rPr lang="pt-BR" dirty="0">
+                <a:solidFill>
+                  <a:schemeClr val="tx1"/>
+                </a:solidFill>
+              </a:rPr>
+              <a:t> (MQ)</a:t>
+            </a:r>
+            <a:endParaRPr lang="en-US" dirty="0">
+              <a:solidFill>
+                <a:schemeClr val="tx1"/>
+              </a:solidFill>
+            </a:endParaRPr>
+          </a:p>
+        </p:txBody>
+      </p:sp>
+      <p:sp>
+        <p:nvSpPr>
+          <p:cNvPr id="8" name="Rectangle 7">
+            <a:extLst>
+              <a:ext uri="{FF2B5EF4-FFF2-40B4-BE49-F238E27FC236}">
+                <a16:creationId xmlns:a16="http://schemas.microsoft.com/office/drawing/2014/main" id="{9D127288-0108-A087-142B-0D20EE4037E8}"/>
+              </a:ext>
+            </a:extLst>
+          </p:cNvPr>
+          <p:cNvSpPr/>
+          <p:nvPr/>
+        </p:nvSpPr>
+        <p:spPr>
+          <a:xfrm>
+            <a:off x="9157230" y="5157521"/>
+            <a:ext cx="1791729" cy="333633"/>
+          </a:xfrm>
+          <a:prstGeom prst="rect">
+            <a:avLst/>
+          </a:prstGeom>
+          <a:solidFill>
+            <a:schemeClr val="accent2">
+              <a:lumMod val="20000"/>
+              <a:lumOff val="80000"/>
+            </a:schemeClr>
+          </a:solidFill>
+        </p:spPr>
+        <p:style>
+          <a:lnRef idx="2">
+            <a:schemeClr val="accent1">
+              <a:shade val="15000"/>
+            </a:schemeClr>
+          </a:lnRef>
+          <a:fillRef idx="1">
+            <a:schemeClr val="accent1"/>
+          </a:fillRef>
+          <a:effectRef idx="0">
+            <a:schemeClr val="accent1"/>
+          </a:effectRef>
+          <a:fontRef idx="minor">
+            <a:schemeClr val="lt1"/>
+          </a:fontRef>
+        </p:style>
+        <p:txBody>
+          <a:bodyPr rtlCol="0" anchor="ctr"/>
+          <a:lstStyle/>
+          <a:p>
+            <a:pPr algn="ctr"/>
+            <a:r>
+              <a:rPr lang="pt-BR" dirty="0">
+                <a:solidFill>
+                  <a:schemeClr val="tx1"/>
+                </a:solidFill>
+              </a:rPr>
+              <a:t>App</a:t>
+            </a:r>
+            <a:endParaRPr lang="en-US" dirty="0">
+              <a:solidFill>
+                <a:schemeClr val="tx1"/>
+              </a:solidFill>
+            </a:endParaRPr>
+          </a:p>
+        </p:txBody>
+      </p:sp>
+      <p:sp>
+        <p:nvSpPr>
+          <p:cNvPr id="9" name="Rectangle 8">
+            <a:extLst>
+              <a:ext uri="{FF2B5EF4-FFF2-40B4-BE49-F238E27FC236}">
+                <a16:creationId xmlns:a16="http://schemas.microsoft.com/office/drawing/2014/main" id="{F58270AC-0FD6-BCAD-36BC-21987097F8FC}"/>
+              </a:ext>
+            </a:extLst>
+          </p:cNvPr>
+          <p:cNvSpPr/>
+          <p:nvPr/>
+        </p:nvSpPr>
+        <p:spPr>
+          <a:xfrm>
+            <a:off x="9309630" y="5309921"/>
+            <a:ext cx="1791729" cy="333633"/>
+          </a:xfrm>
+          <a:prstGeom prst="rect">
+            <a:avLst/>
+          </a:prstGeom>
+          <a:solidFill>
+            <a:srgbClr val="FF0000"/>
+          </a:solidFill>
+        </p:spPr>
+        <p:style>
+          <a:lnRef idx="2">
+            <a:schemeClr val="accent1">
+              <a:shade val="15000"/>
+            </a:schemeClr>
+          </a:lnRef>
+          <a:fillRef idx="1">
+            <a:schemeClr val="accent1"/>
+          </a:fillRef>
+          <a:effectRef idx="0">
+            <a:schemeClr val="accent1"/>
+          </a:effectRef>
+          <a:fontRef idx="minor">
+            <a:schemeClr val="lt1"/>
+          </a:fontRef>
+        </p:style>
+        <p:txBody>
+          <a:bodyPr rtlCol="0" anchor="ctr"/>
+          <a:lstStyle/>
+          <a:p>
+            <a:pPr algn="ctr"/>
+            <a:r>
+              <a:rPr lang="pt-BR" dirty="0">
+                <a:solidFill>
+                  <a:schemeClr val="tx1"/>
+                </a:solidFill>
+              </a:rPr>
+              <a:t>App</a:t>
+            </a:r>
+            <a:endParaRPr lang="en-US" dirty="0">
+              <a:solidFill>
+                <a:schemeClr val="tx1"/>
+              </a:solidFill>
+            </a:endParaRPr>
+          </a:p>
+        </p:txBody>
+      </p:sp>
+      <p:sp>
+        <p:nvSpPr>
+          <p:cNvPr id="10" name="Rectangle 9">
+            <a:extLst>
+              <a:ext uri="{FF2B5EF4-FFF2-40B4-BE49-F238E27FC236}">
+                <a16:creationId xmlns:a16="http://schemas.microsoft.com/office/drawing/2014/main" id="{5A19D59E-427D-6079-EBCB-BDE469143F22}"/>
+              </a:ext>
+            </a:extLst>
+          </p:cNvPr>
+          <p:cNvSpPr/>
+          <p:nvPr/>
+        </p:nvSpPr>
+        <p:spPr>
+          <a:xfrm>
+            <a:off x="9462030" y="5462321"/>
+            <a:ext cx="1791729" cy="333633"/>
+          </a:xfrm>
+          <a:prstGeom prst="rect">
+            <a:avLst/>
+          </a:prstGeom>
+        </p:spPr>
+        <p:style>
+          <a:lnRef idx="2">
+            <a:schemeClr val="accent1">
+              <a:shade val="15000"/>
+            </a:schemeClr>
+          </a:lnRef>
+          <a:fillRef idx="1">
+            <a:schemeClr val="accent1"/>
+          </a:fillRef>
+          <a:effectRef idx="0">
+            <a:schemeClr val="accent1"/>
+          </a:effectRef>
+          <a:fontRef idx="minor">
+            <a:schemeClr val="lt1"/>
+          </a:fontRef>
+        </p:style>
+        <p:txBody>
+          <a:bodyPr rtlCol="0" anchor="ctr"/>
+          <a:lstStyle/>
+          <a:p>
+            <a:pPr algn="ctr"/>
+            <a:r>
+              <a:rPr lang="pt-BR" dirty="0">
+                <a:solidFill>
+                  <a:schemeClr val="tx1"/>
+                </a:solidFill>
+              </a:rPr>
+              <a:t>App</a:t>
+            </a:r>
+            <a:endParaRPr lang="en-US" dirty="0">
+              <a:solidFill>
+                <a:schemeClr val="tx1"/>
+              </a:solidFill>
+            </a:endParaRPr>
+          </a:p>
+        </p:txBody>
+      </p:sp>
+      <p:sp>
+        <p:nvSpPr>
+          <p:cNvPr id="11" name="Rectangle 10">
+            <a:extLst>
+              <a:ext uri="{FF2B5EF4-FFF2-40B4-BE49-F238E27FC236}">
+                <a16:creationId xmlns:a16="http://schemas.microsoft.com/office/drawing/2014/main" id="{76D46C60-B637-4A69-AF12-7F67BAAC4734}"/>
+              </a:ext>
+            </a:extLst>
+          </p:cNvPr>
+          <p:cNvSpPr/>
+          <p:nvPr/>
+        </p:nvSpPr>
+        <p:spPr>
+          <a:xfrm>
+            <a:off x="9614430" y="5614721"/>
+            <a:ext cx="1791729" cy="333633"/>
+          </a:xfrm>
+          <a:prstGeom prst="rect">
+            <a:avLst/>
+          </a:prstGeom>
+          <a:solidFill>
+            <a:schemeClr val="accent3">
+              <a:lumMod val="60000"/>
+              <a:lumOff val="40000"/>
+            </a:schemeClr>
+          </a:solidFill>
+        </p:spPr>
+        <p:style>
+          <a:lnRef idx="2">
+            <a:schemeClr val="accent1">
+              <a:shade val="15000"/>
+            </a:schemeClr>
+          </a:lnRef>
+          <a:fillRef idx="1">
+            <a:schemeClr val="accent1"/>
+          </a:fillRef>
+          <a:effectRef idx="0">
+            <a:schemeClr val="accent1"/>
+          </a:effectRef>
+          <a:fontRef idx="minor">
+            <a:schemeClr val="lt1"/>
+          </a:fontRef>
+        </p:style>
+        <p:txBody>
+          <a:bodyPr rtlCol="0" anchor="ctr"/>
+          <a:lstStyle/>
+          <a:p>
+            <a:pPr algn="ctr"/>
+            <a:r>
+              <a:rPr lang="pt-BR" dirty="0">
+                <a:solidFill>
+                  <a:schemeClr val="tx1"/>
+                </a:solidFill>
+              </a:rPr>
+              <a:t>App</a:t>
+            </a:r>
+            <a:endParaRPr lang="en-US" dirty="0">
+              <a:solidFill>
+                <a:schemeClr val="tx1"/>
+              </a:solidFill>
+            </a:endParaRPr>
+          </a:p>
+        </p:txBody>
+      </p:sp>
+      <p:sp>
+        <p:nvSpPr>
+          <p:cNvPr id="12" name="Rectangle 11">
+            <a:extLst>
+              <a:ext uri="{FF2B5EF4-FFF2-40B4-BE49-F238E27FC236}">
+                <a16:creationId xmlns:a16="http://schemas.microsoft.com/office/drawing/2014/main" id="{4877C355-45E3-923A-5DE4-B0DCA2E1B609}"/>
+              </a:ext>
+            </a:extLst>
+          </p:cNvPr>
+          <p:cNvSpPr/>
+          <p:nvPr/>
+        </p:nvSpPr>
+        <p:spPr>
+          <a:xfrm>
+            <a:off x="9021304" y="3578865"/>
+            <a:ext cx="2458995" cy="1028700"/>
+          </a:xfrm>
+          <a:prstGeom prst="rect">
+            <a:avLst/>
+          </a:prstGeom>
+          <a:solidFill>
+            <a:schemeClr val="accent6">
+              <a:lumMod val="20000"/>
+              <a:lumOff val="80000"/>
+            </a:schemeClr>
+          </a:solidFill>
+        </p:spPr>
+        <p:style>
+          <a:lnRef idx="2">
+            <a:schemeClr val="accent1">
+              <a:shade val="15000"/>
+            </a:schemeClr>
+          </a:lnRef>
+          <a:fillRef idx="1">
+            <a:schemeClr val="accent1"/>
+          </a:fillRef>
+          <a:effectRef idx="0">
+            <a:schemeClr val="accent1"/>
+          </a:effectRef>
+          <a:fontRef idx="minor">
+            <a:schemeClr val="lt1"/>
+          </a:fontRef>
+        </p:style>
+        <p:txBody>
+          <a:bodyPr rtlCol="0" anchor="t"/>
+          <a:lstStyle/>
+          <a:p>
+            <a:r>
+              <a:rPr lang="pt-BR" dirty="0" err="1">
+                <a:solidFill>
+                  <a:schemeClr val="tx1"/>
+                </a:solidFill>
+              </a:rPr>
+              <a:t>I.Server</a:t>
+            </a:r>
+            <a:r>
+              <a:rPr lang="pt-BR" dirty="0">
+                <a:solidFill>
+                  <a:schemeClr val="tx1"/>
+                </a:solidFill>
+              </a:rPr>
+              <a:t> (EG)</a:t>
+            </a:r>
+            <a:endParaRPr lang="en-US" dirty="0">
+              <a:solidFill>
+                <a:schemeClr val="tx1"/>
+              </a:solidFill>
+            </a:endParaRPr>
+          </a:p>
+        </p:txBody>
+      </p:sp>
+      <p:sp>
+        <p:nvSpPr>
+          <p:cNvPr id="13" name="Rectangle 12">
+            <a:extLst>
+              <a:ext uri="{FF2B5EF4-FFF2-40B4-BE49-F238E27FC236}">
+                <a16:creationId xmlns:a16="http://schemas.microsoft.com/office/drawing/2014/main" id="{ADEB350F-0BBE-EE5C-3168-A3F1F3B62D28}"/>
+              </a:ext>
+            </a:extLst>
+          </p:cNvPr>
+          <p:cNvSpPr/>
+          <p:nvPr/>
+        </p:nvSpPr>
+        <p:spPr>
+          <a:xfrm>
+            <a:off x="9157230" y="4165811"/>
+            <a:ext cx="1791729" cy="333633"/>
+          </a:xfrm>
+          <a:prstGeom prst="rect">
+            <a:avLst/>
+          </a:prstGeom>
+          <a:solidFill>
+            <a:schemeClr val="accent2">
+              <a:lumMod val="20000"/>
+              <a:lumOff val="80000"/>
+            </a:schemeClr>
+          </a:solidFill>
+        </p:spPr>
+        <p:style>
+          <a:lnRef idx="2">
+            <a:schemeClr val="accent1">
+              <a:shade val="15000"/>
+            </a:schemeClr>
+          </a:lnRef>
+          <a:fillRef idx="1">
+            <a:schemeClr val="accent1"/>
+          </a:fillRef>
+          <a:effectRef idx="0">
+            <a:schemeClr val="accent1"/>
+          </a:effectRef>
+          <a:fontRef idx="minor">
+            <a:schemeClr val="lt1"/>
+          </a:fontRef>
+        </p:style>
+        <p:txBody>
+          <a:bodyPr rtlCol="0" anchor="ctr"/>
+          <a:lstStyle/>
+          <a:p>
+            <a:pPr algn="ctr"/>
+            <a:r>
+              <a:rPr lang="pt-BR" dirty="0">
+                <a:solidFill>
+                  <a:schemeClr val="tx1"/>
+                </a:solidFill>
+              </a:rPr>
+              <a:t>App</a:t>
+            </a:r>
+            <a:endParaRPr lang="en-US" dirty="0">
+              <a:solidFill>
+                <a:schemeClr val="tx1"/>
+              </a:solidFill>
+            </a:endParaRPr>
+          </a:p>
+        </p:txBody>
+      </p:sp>
+      <p:sp>
+        <p:nvSpPr>
+          <p:cNvPr id="19" name="Rectangle 18">
+            <a:extLst>
+              <a:ext uri="{FF2B5EF4-FFF2-40B4-BE49-F238E27FC236}">
+                <a16:creationId xmlns:a16="http://schemas.microsoft.com/office/drawing/2014/main" id="{E48B8252-5EA0-4333-18AB-652D3AAF1FFD}"/>
+              </a:ext>
+            </a:extLst>
+          </p:cNvPr>
+          <p:cNvSpPr/>
+          <p:nvPr/>
+        </p:nvSpPr>
+        <p:spPr>
+          <a:xfrm>
+            <a:off x="7662062" y="3982003"/>
+            <a:ext cx="1791729" cy="333633"/>
+          </a:xfrm>
+          <a:prstGeom prst="rect">
+            <a:avLst/>
+          </a:prstGeom>
+          <a:solidFill>
+            <a:schemeClr val="bg1">
+              <a:lumMod val="85000"/>
+            </a:schemeClr>
+          </a:solidFill>
+        </p:spPr>
+        <p:style>
+          <a:lnRef idx="2">
+            <a:schemeClr val="accent1">
+              <a:shade val="15000"/>
+            </a:schemeClr>
+          </a:lnRef>
+          <a:fillRef idx="1">
+            <a:schemeClr val="accent1"/>
+          </a:fillRef>
+          <a:effectRef idx="0">
+            <a:schemeClr val="accent1"/>
+          </a:effectRef>
+          <a:fontRef idx="minor">
+            <a:schemeClr val="lt1"/>
+          </a:fontRef>
+        </p:style>
+        <p:txBody>
+          <a:bodyPr rtlCol="0" anchor="ctr"/>
+          <a:lstStyle/>
+          <a:p>
+            <a:pPr algn="ctr"/>
+            <a:r>
+              <a:rPr lang="pt-BR" dirty="0" err="1">
+                <a:solidFill>
+                  <a:schemeClr val="tx1"/>
+                </a:solidFill>
+              </a:rPr>
+              <a:t>Listener</a:t>
+            </a:r>
+            <a:r>
+              <a:rPr lang="pt-BR" dirty="0">
+                <a:solidFill>
+                  <a:schemeClr val="tx1"/>
+                </a:solidFill>
+              </a:rPr>
+              <a:t> (HTTP)</a:t>
+            </a:r>
+            <a:endParaRPr lang="en-US" dirty="0">
+              <a:solidFill>
+                <a:schemeClr val="tx1"/>
+              </a:solidFill>
+            </a:endParaRPr>
+          </a:p>
+        </p:txBody>
+      </p:sp>
+      <p:sp>
+        <p:nvSpPr>
+          <p:cNvPr id="22" name="Rectangle 21">
+            <a:extLst>
+              <a:ext uri="{FF2B5EF4-FFF2-40B4-BE49-F238E27FC236}">
+                <a16:creationId xmlns:a16="http://schemas.microsoft.com/office/drawing/2014/main" id="{39BAB804-AFA1-D0FE-C876-0E68F29E8478}"/>
+              </a:ext>
+            </a:extLst>
+          </p:cNvPr>
+          <p:cNvSpPr/>
+          <p:nvPr/>
+        </p:nvSpPr>
+        <p:spPr>
+          <a:xfrm>
+            <a:off x="815623" y="931509"/>
+            <a:ext cx="1791730" cy="1445741"/>
+          </a:xfrm>
+          <a:prstGeom prst="rect">
+            <a:avLst/>
+          </a:prstGeom>
+          <a:solidFill>
+            <a:srgbClr val="FFC000"/>
+          </a:solidFill>
+        </p:spPr>
+        <p:style>
+          <a:lnRef idx="2">
+            <a:schemeClr val="accent1">
+              <a:shade val="15000"/>
+            </a:schemeClr>
+          </a:lnRef>
+          <a:fillRef idx="1">
+            <a:schemeClr val="accent1"/>
+          </a:fillRef>
+          <a:effectRef idx="0">
+            <a:schemeClr val="accent1"/>
+          </a:effectRef>
+          <a:fontRef idx="minor">
+            <a:schemeClr val="lt1"/>
+          </a:fontRef>
+        </p:style>
+        <p:txBody>
+          <a:bodyPr rtlCol="0" anchor="t"/>
+          <a:lstStyle/>
+          <a:p>
+            <a:r>
+              <a:rPr lang="pt-BR" dirty="0">
+                <a:solidFill>
+                  <a:schemeClr val="tx1"/>
+                </a:solidFill>
+              </a:rPr>
+              <a:t>MQ Server</a:t>
+            </a:r>
+            <a:endParaRPr lang="en-US" dirty="0">
+              <a:solidFill>
+                <a:schemeClr val="tx1"/>
+              </a:solidFill>
+            </a:endParaRPr>
+          </a:p>
+        </p:txBody>
+      </p:sp>
+      <p:sp>
+        <p:nvSpPr>
+          <p:cNvPr id="24" name="Rectangle 23">
+            <a:extLst>
+              <a:ext uri="{FF2B5EF4-FFF2-40B4-BE49-F238E27FC236}">
+                <a16:creationId xmlns:a16="http://schemas.microsoft.com/office/drawing/2014/main" id="{BC88B31E-7254-1D1A-5E44-557E07BB6887}"/>
+              </a:ext>
+            </a:extLst>
+          </p:cNvPr>
+          <p:cNvSpPr/>
+          <p:nvPr/>
+        </p:nvSpPr>
+        <p:spPr>
+          <a:xfrm>
+            <a:off x="4248744" y="3103365"/>
+            <a:ext cx="1791730" cy="1445741"/>
+          </a:xfrm>
+          <a:prstGeom prst="rect">
+            <a:avLst/>
+          </a:prstGeom>
+          <a:solidFill>
+            <a:srgbClr val="FFC000"/>
+          </a:solidFill>
+        </p:spPr>
+        <p:style>
+          <a:lnRef idx="2">
+            <a:schemeClr val="accent1">
+              <a:shade val="15000"/>
+            </a:schemeClr>
+          </a:lnRef>
+          <a:fillRef idx="1">
+            <a:schemeClr val="accent1"/>
+          </a:fillRef>
+          <a:effectRef idx="0">
+            <a:schemeClr val="accent1"/>
+          </a:effectRef>
+          <a:fontRef idx="minor">
+            <a:schemeClr val="lt1"/>
+          </a:fontRef>
+        </p:style>
+        <p:txBody>
+          <a:bodyPr rtlCol="0" anchor="t"/>
+          <a:lstStyle/>
+          <a:p>
+            <a:r>
+              <a:rPr lang="pt-BR" dirty="0">
+                <a:solidFill>
+                  <a:schemeClr val="tx1"/>
+                </a:solidFill>
+              </a:rPr>
+              <a:t>MQ Server</a:t>
+            </a:r>
+            <a:endParaRPr lang="en-US" dirty="0">
+              <a:solidFill>
+                <a:schemeClr val="tx1"/>
+              </a:solidFill>
+            </a:endParaRPr>
+          </a:p>
+        </p:txBody>
+      </p:sp>
+      <p:sp>
+        <p:nvSpPr>
+          <p:cNvPr id="25" name="Rectangle 24">
+            <a:extLst>
+              <a:ext uri="{FF2B5EF4-FFF2-40B4-BE49-F238E27FC236}">
+                <a16:creationId xmlns:a16="http://schemas.microsoft.com/office/drawing/2014/main" id="{3A835187-C66F-A575-56C6-8D1B5DB3C15B}"/>
+              </a:ext>
+            </a:extLst>
+          </p:cNvPr>
+          <p:cNvSpPr/>
+          <p:nvPr/>
+        </p:nvSpPr>
+        <p:spPr>
+          <a:xfrm>
+            <a:off x="7797988" y="2743270"/>
+            <a:ext cx="1791729" cy="333633"/>
+          </a:xfrm>
+          <a:prstGeom prst="rect">
+            <a:avLst/>
+          </a:prstGeom>
+          <a:solidFill>
+            <a:schemeClr val="bg1">
+              <a:lumMod val="85000"/>
+            </a:schemeClr>
+          </a:solidFill>
+        </p:spPr>
+        <p:style>
+          <a:lnRef idx="2">
+            <a:schemeClr val="accent1">
+              <a:shade val="15000"/>
+            </a:schemeClr>
+          </a:lnRef>
+          <a:fillRef idx="1">
+            <a:schemeClr val="accent1"/>
+          </a:fillRef>
+          <a:effectRef idx="0">
+            <a:schemeClr val="accent1"/>
+          </a:effectRef>
+          <a:fontRef idx="minor">
+            <a:schemeClr val="lt1"/>
+          </a:fontRef>
+        </p:style>
+        <p:txBody>
+          <a:bodyPr rtlCol="0" anchor="ctr"/>
+          <a:lstStyle/>
+          <a:p>
+            <a:pPr algn="ctr"/>
+            <a:r>
+              <a:rPr lang="pt-BR" dirty="0" err="1">
+                <a:solidFill>
+                  <a:schemeClr val="tx1"/>
+                </a:solidFill>
+              </a:rPr>
+              <a:t>Listener</a:t>
+            </a:r>
+            <a:r>
+              <a:rPr lang="pt-BR" dirty="0">
+                <a:solidFill>
+                  <a:schemeClr val="tx1"/>
+                </a:solidFill>
+              </a:rPr>
+              <a:t> (TCP)</a:t>
+            </a:r>
+            <a:endParaRPr lang="en-US" dirty="0">
+              <a:solidFill>
+                <a:schemeClr val="tx1"/>
+              </a:solidFill>
+            </a:endParaRPr>
+          </a:p>
+        </p:txBody>
+      </p:sp>
+      <p:cxnSp>
+        <p:nvCxnSpPr>
+          <p:cNvPr id="27" name="Straight Arrow Connector 26">
+            <a:extLst>
+              <a:ext uri="{FF2B5EF4-FFF2-40B4-BE49-F238E27FC236}">
+                <a16:creationId xmlns:a16="http://schemas.microsoft.com/office/drawing/2014/main" id="{316A2419-0620-4D8F-10E9-C379EF94642C}"/>
+              </a:ext>
+            </a:extLst>
+          </p:cNvPr>
+          <p:cNvCxnSpPr>
+            <a:cxnSpLocks/>
+            <a:stCxn id="7" idx="1"/>
+            <a:endCxn id="24" idx="3"/>
+          </p:cNvCxnSpPr>
+          <p:nvPr/>
+        </p:nvCxnSpPr>
+        <p:spPr>
+          <a:xfrm flipH="1">
+            <a:off x="6040474" y="2434511"/>
+            <a:ext cx="1757514" cy="1391725"/>
+          </a:xfrm>
+          <a:prstGeom prst="straightConnector1">
+            <a:avLst/>
+          </a:prstGeom>
+          <a:ln>
+            <a:tailEnd type="triangle"/>
+          </a:ln>
+        </p:spPr>
+        <p:style>
+          <a:lnRef idx="2">
+            <a:schemeClr val="accent1"/>
+          </a:lnRef>
+          <a:fillRef idx="0">
+            <a:schemeClr val="accent1"/>
+          </a:fillRef>
+          <a:effectRef idx="1">
+            <a:schemeClr val="accent1"/>
+          </a:effectRef>
+          <a:fontRef idx="minor">
+            <a:schemeClr val="tx1"/>
+          </a:fontRef>
+        </p:style>
+      </p:cxnSp>
+      <p:cxnSp>
+        <p:nvCxnSpPr>
+          <p:cNvPr id="29" name="Straight Arrow Connector 28">
+            <a:extLst>
+              <a:ext uri="{FF2B5EF4-FFF2-40B4-BE49-F238E27FC236}">
+                <a16:creationId xmlns:a16="http://schemas.microsoft.com/office/drawing/2014/main" id="{BF150FFF-4949-3442-606B-5121B92B17B2}"/>
+              </a:ext>
+            </a:extLst>
+          </p:cNvPr>
+          <p:cNvCxnSpPr>
+            <a:cxnSpLocks/>
+            <a:stCxn id="7" idx="1"/>
+            <a:endCxn id="22" idx="3"/>
+          </p:cNvCxnSpPr>
+          <p:nvPr/>
+        </p:nvCxnSpPr>
+        <p:spPr>
+          <a:xfrm flipH="1" flipV="1">
+            <a:off x="2607353" y="1654380"/>
+            <a:ext cx="5190635" cy="780131"/>
+          </a:xfrm>
+          <a:prstGeom prst="straightConnector1">
+            <a:avLst/>
+          </a:prstGeom>
+          <a:ln>
+            <a:tailEnd type="triangle"/>
+          </a:ln>
+        </p:spPr>
+        <p:style>
+          <a:lnRef idx="2">
+            <a:schemeClr val="accent1"/>
+          </a:lnRef>
+          <a:fillRef idx="0">
+            <a:schemeClr val="accent1"/>
+          </a:fillRef>
+          <a:effectRef idx="1">
+            <a:schemeClr val="accent1"/>
+          </a:effectRef>
+          <a:fontRef idx="minor">
+            <a:schemeClr val="tx1"/>
+          </a:fontRef>
+        </p:style>
+      </p:cxnSp>
+      <p:sp>
+        <p:nvSpPr>
+          <p:cNvPr id="32" name="Rectangle 31">
+            <a:extLst>
+              <a:ext uri="{FF2B5EF4-FFF2-40B4-BE49-F238E27FC236}">
+                <a16:creationId xmlns:a16="http://schemas.microsoft.com/office/drawing/2014/main" id="{3054FC52-1511-A5A9-DFB3-A1FB959964F9}"/>
+              </a:ext>
+            </a:extLst>
+          </p:cNvPr>
+          <p:cNvSpPr/>
+          <p:nvPr/>
+        </p:nvSpPr>
+        <p:spPr>
+          <a:xfrm>
+            <a:off x="9157230" y="693275"/>
+            <a:ext cx="2619709" cy="692078"/>
+          </a:xfrm>
+          <a:prstGeom prst="rect">
+            <a:avLst/>
+          </a:prstGeom>
+          <a:solidFill>
+            <a:srgbClr val="FFC000"/>
+          </a:solidFill>
+        </p:spPr>
+        <p:style>
+          <a:lnRef idx="2">
+            <a:schemeClr val="accent1">
+              <a:shade val="15000"/>
+            </a:schemeClr>
+          </a:lnRef>
+          <a:fillRef idx="1">
+            <a:schemeClr val="accent1"/>
+          </a:fillRef>
+          <a:effectRef idx="0">
+            <a:schemeClr val="accent1"/>
+          </a:effectRef>
+          <a:fontRef idx="minor">
+            <a:schemeClr val="lt1"/>
+          </a:fontRef>
+        </p:style>
+        <p:txBody>
+          <a:bodyPr rtlCol="0" anchor="t"/>
+          <a:lstStyle/>
+          <a:p>
+            <a:r>
+              <a:rPr lang="pt-BR" dirty="0">
+                <a:solidFill>
+                  <a:schemeClr val="tx1"/>
+                </a:solidFill>
+              </a:rPr>
+              <a:t>MQ Server (</a:t>
+            </a:r>
+            <a:r>
+              <a:rPr lang="pt-BR" dirty="0" err="1">
+                <a:solidFill>
+                  <a:schemeClr val="tx1"/>
+                </a:solidFill>
+              </a:rPr>
+              <a:t>Bind</a:t>
+            </a:r>
+            <a:r>
+              <a:rPr lang="pt-BR" dirty="0">
+                <a:solidFill>
+                  <a:schemeClr val="tx1"/>
+                </a:solidFill>
+              </a:rPr>
+              <a:t>)</a:t>
+            </a:r>
+            <a:endParaRPr lang="en-US" dirty="0">
+              <a:solidFill>
+                <a:schemeClr val="tx1"/>
+              </a:solidFill>
+            </a:endParaRPr>
+          </a:p>
+        </p:txBody>
+      </p:sp>
+      <p:sp>
+        <p:nvSpPr>
+          <p:cNvPr id="40" name="Rectangle 39">
+            <a:extLst>
+              <a:ext uri="{FF2B5EF4-FFF2-40B4-BE49-F238E27FC236}">
+                <a16:creationId xmlns:a16="http://schemas.microsoft.com/office/drawing/2014/main" id="{E782A92B-3D99-01D5-2A8D-69DA37A4C319}"/>
+              </a:ext>
+            </a:extLst>
+          </p:cNvPr>
+          <p:cNvSpPr/>
+          <p:nvPr/>
+        </p:nvSpPr>
+        <p:spPr>
+          <a:xfrm>
+            <a:off x="11700133" y="1813584"/>
+            <a:ext cx="1596980" cy="736494"/>
+          </a:xfrm>
+          <a:prstGeom prst="rect">
+            <a:avLst/>
+          </a:prstGeom>
+        </p:spPr>
+        <p:style>
+          <a:lnRef idx="2">
+            <a:schemeClr val="accent1">
+              <a:shade val="15000"/>
+            </a:schemeClr>
+          </a:lnRef>
+          <a:fillRef idx="1">
+            <a:schemeClr val="accent1"/>
+          </a:fillRef>
+          <a:effectRef idx="0">
+            <a:schemeClr val="accent1"/>
+          </a:effectRef>
+          <a:fontRef idx="minor">
+            <a:schemeClr val="lt1"/>
+          </a:fontRef>
+        </p:style>
+        <p:txBody>
+          <a:bodyPr rtlCol="0" anchor="ctr"/>
+          <a:lstStyle/>
+          <a:p>
+            <a:pPr algn="ctr"/>
+            <a:r>
+              <a:rPr lang="pt-BR" dirty="0" err="1"/>
+              <a:t>KeyStore</a:t>
+            </a:r>
+            <a:endParaRPr lang="pt-BR" dirty="0"/>
+          </a:p>
+          <a:p>
+            <a:pPr algn="ctr"/>
+            <a:r>
+              <a:rPr lang="pt-BR" dirty="0" err="1"/>
+              <a:t>trustStore</a:t>
+            </a:r>
+            <a:endParaRPr lang="en-US" dirty="0"/>
+          </a:p>
+        </p:txBody>
+      </p:sp>
+      <p:sp>
+        <p:nvSpPr>
+          <p:cNvPr id="41" name="Rectangle 40">
+            <a:extLst>
+              <a:ext uri="{FF2B5EF4-FFF2-40B4-BE49-F238E27FC236}">
+                <a16:creationId xmlns:a16="http://schemas.microsoft.com/office/drawing/2014/main" id="{31A2D01C-61EC-2A4A-FB29-E64E76F5AC10}"/>
+              </a:ext>
+            </a:extLst>
+          </p:cNvPr>
+          <p:cNvSpPr/>
+          <p:nvPr/>
+        </p:nvSpPr>
+        <p:spPr>
+          <a:xfrm>
+            <a:off x="11367611" y="3756251"/>
+            <a:ext cx="1596980" cy="736494"/>
+          </a:xfrm>
+          <a:prstGeom prst="rect">
+            <a:avLst/>
+          </a:prstGeom>
+        </p:spPr>
+        <p:style>
+          <a:lnRef idx="2">
+            <a:schemeClr val="accent1">
+              <a:shade val="15000"/>
+            </a:schemeClr>
+          </a:lnRef>
+          <a:fillRef idx="1">
+            <a:schemeClr val="accent1"/>
+          </a:fillRef>
+          <a:effectRef idx="0">
+            <a:schemeClr val="accent1"/>
+          </a:effectRef>
+          <a:fontRef idx="minor">
+            <a:schemeClr val="lt1"/>
+          </a:fontRef>
+        </p:style>
+        <p:txBody>
+          <a:bodyPr rtlCol="0" anchor="ctr"/>
+          <a:lstStyle/>
+          <a:p>
+            <a:pPr algn="ctr"/>
+            <a:r>
+              <a:rPr lang="pt-BR" dirty="0" err="1"/>
+              <a:t>KeyStore</a:t>
+            </a:r>
+            <a:endParaRPr lang="pt-BR" dirty="0"/>
+          </a:p>
+          <a:p>
+            <a:pPr algn="ctr"/>
+            <a:r>
+              <a:rPr lang="pt-BR" dirty="0" err="1"/>
+              <a:t>trustStore</a:t>
+            </a:r>
+            <a:endParaRPr lang="en-US" dirty="0"/>
+          </a:p>
+        </p:txBody>
+      </p:sp>
+    </p:spTree>
+    <p:extLst>
+      <p:ext uri="{BB962C8B-B14F-4D97-AF65-F5344CB8AC3E}">
+        <p14:creationId xmlns:p14="http://schemas.microsoft.com/office/powerpoint/2010/main" val="1912926103"/>
       </p:ext>
     </p:extLst>
   </p:cSld>
